--- a/slides/release/07__inter-3-delivery-transactions.pptx
+++ b/slides/release/07__inter-3-delivery-transactions.pptx
@@ -5,26 +5,26 @@
     <p:sldMasterId id="2147483651" r:id="rId1"/>
   </p:sldMasterIdLst>
   <p:notesMasterIdLst>
-    <p:notesMasterId r:id="rId2"/>
+    <p:notesMasterId r:id="rId16"/>
   </p:notesMasterIdLst>
   <p:handoutMasterIdLst>
-    <p:handoutMasterId r:id="rId3"/>
+    <p:handoutMasterId r:id="rId17"/>
   </p:handoutMasterIdLst>
   <p:sldIdLst>
-    <p:sldId id="256" r:id="rId9"/>
-    <p:sldId id="257" r:id="rId10"/>
-    <p:sldId id="258" r:id="rId11"/>
-    <p:sldId id="259" r:id="rId12"/>
-    <p:sldId id="260" r:id="rId13"/>
-    <p:sldId id="261" r:id="rId14"/>
-    <p:sldId id="262" r:id="rId15"/>
-    <p:sldId id="263" r:id="rId16"/>
-    <p:sldId id="264" r:id="rId17"/>
-    <p:sldId id="265" r:id="rId18"/>
-    <p:sldId id="266" r:id="rId19"/>
-    <p:sldId id="267" r:id="rId20"/>
-    <p:sldId id="268" r:id="rId21"/>
-    <p:sldId id="269" r:id="rId22"/>
+    <p:sldId id="256" r:id="rId2"/>
+    <p:sldId id="257" r:id="rId3"/>
+    <p:sldId id="258" r:id="rId4"/>
+    <p:sldId id="259" r:id="rId5"/>
+    <p:sldId id="260" r:id="rId6"/>
+    <p:sldId id="261" r:id="rId7"/>
+    <p:sldId id="262" r:id="rId8"/>
+    <p:sldId id="263" r:id="rId9"/>
+    <p:sldId id="264" r:id="rId10"/>
+    <p:sldId id="265" r:id="rId11"/>
+    <p:sldId id="266" r:id="rId12"/>
+    <p:sldId id="267" r:id="rId13"/>
+    <p:sldId id="268" r:id="rId14"/>
+    <p:sldId id="269" r:id="rId15"/>
   </p:sldIdLst>
   <p:sldSz cx="9372600" cy="8297863"/>
   <p:notesSz cx="7315200" cy="9601200"/>
@@ -192,9 +192,7 @@
   <p:cmAuthor id="2" name="Mark Kerzner" initials="MK" lastIdx="6" clrIdx="1"/>
   <p:cmAuthor id="3" name="Mary Beth Conlee" initials="MBC" lastIdx="7" clrIdx="2"/>
   <p:cmAuthor id="4" name="Michelle" initials="M" lastIdx="5" clrIdx="3"/>
-  <p:cmAuthor id="5" name="Tricia Murphy" initials="TM" lastIdx="4" clrIdx="4">
-    <p:extLst/>
-  </p:cmAuthor>
+  <p:cmAuthor id="5" name="Tricia Murphy" initials="TM" lastIdx="4" clrIdx="4"/>
 </p:cmAuthorLst>
 </file>
 
@@ -764,7 +762,7 @@
 </file>
 
 <file path=ppt/notesSlides/notesSlide1.xml><?xml version="1.0" encoding="utf-8"?>
-<p:notes xmlns:a="http://schemas.openxmlformats.org/drawingml/2006/main" xmlns:p="http://schemas.openxmlformats.org/presentationml/2006/main" xmlns:r="http://schemas.openxmlformats.org/officeDocument/2006/relationships">
+<p:notes xmlns:a="http://schemas.openxmlformats.org/drawingml/2006/main" xmlns:r="http://schemas.openxmlformats.org/officeDocument/2006/relationships" xmlns:p="http://schemas.openxmlformats.org/presentationml/2006/main">
   <p:cSld>
     <p:spTree>
       <p:nvGrpSpPr>
@@ -784,34 +782,34 @@
         <p:nvSpPr>
           <p:cNvPr id="2" name="Slide Image Placeholder 1"/>
           <p:cNvSpPr>
+            <a:spLocks noGrp="1" noRot="1" noChangeAspect="1"/>
+          </p:cNvSpPr>
+          <p:nvPr>
+            <p:ph type="sldImg" idx="2"/>
+          </p:nvPr>
+        </p:nvSpPr>
+        <p:spPr/>
+      </p:sp>
+      <p:sp>
+        <p:nvSpPr>
+          <p:cNvPr id="3" name="Slide Number Placeholder 2"/>
+          <p:cNvSpPr>
             <a:spLocks noGrp="1"/>
           </p:cNvSpPr>
           <p:nvPr>
-            <p:ph type="sldImg" idx="2"/>
+            <p:ph type="sldNum" sz="quarter" idx="5"/>
           </p:nvPr>
         </p:nvSpPr>
         <p:spPr/>
       </p:sp>
       <p:sp>
         <p:nvSpPr>
-          <p:cNvPr id="3" name="Slide Number Placeholder 2"/>
+          <p:cNvPr id="4" name="Notes Placeholder 3"/>
           <p:cNvSpPr>
             <a:spLocks noGrp="1"/>
           </p:cNvSpPr>
           <p:nvPr>
-            <p:ph type="sldNum" idx="5" sz="quarter"/>
-          </p:nvPr>
-        </p:nvSpPr>
-        <p:spPr/>
-      </p:sp>
-      <p:sp>
-        <p:nvSpPr>
-          <p:cNvPr id="4" name="Notes Placeholder 3"/>
-          <p:cNvSpPr>
-            <a:spLocks noGrp="1"/>
-          </p:cNvSpPr>
-          <p:nvPr>
-            <p:ph type="body" idx="3" sz="quarter"/>
+            <p:ph type="body" sz="quarter" idx="3"/>
           </p:nvPr>
         </p:nvSpPr>
         <p:spPr/>
@@ -834,7 +832,7 @@
 </file>
 
 <file path=ppt/notesSlides/notesSlide2.xml><?xml version="1.0" encoding="utf-8"?>
-<p:notes xmlns:a="http://schemas.openxmlformats.org/drawingml/2006/main" xmlns:p="http://schemas.openxmlformats.org/presentationml/2006/main" xmlns:r="http://schemas.openxmlformats.org/officeDocument/2006/relationships">
+<p:notes xmlns:a="http://schemas.openxmlformats.org/drawingml/2006/main" xmlns:r="http://schemas.openxmlformats.org/officeDocument/2006/relationships" xmlns:p="http://schemas.openxmlformats.org/presentationml/2006/main">
   <p:cSld>
     <p:spTree>
       <p:nvGrpSpPr>
@@ -854,34 +852,34 @@
         <p:nvSpPr>
           <p:cNvPr id="2" name="Slide Image Placeholder 1"/>
           <p:cNvSpPr>
+            <a:spLocks noGrp="1" noRot="1" noChangeAspect="1"/>
+          </p:cNvSpPr>
+          <p:nvPr>
+            <p:ph type="sldImg" idx="2"/>
+          </p:nvPr>
+        </p:nvSpPr>
+        <p:spPr/>
+      </p:sp>
+      <p:sp>
+        <p:nvSpPr>
+          <p:cNvPr id="3" name="Slide Number Placeholder 2"/>
+          <p:cNvSpPr>
             <a:spLocks noGrp="1"/>
           </p:cNvSpPr>
           <p:nvPr>
-            <p:ph type="sldImg" idx="2"/>
+            <p:ph type="sldNum" sz="quarter" idx="5"/>
           </p:nvPr>
         </p:nvSpPr>
         <p:spPr/>
       </p:sp>
       <p:sp>
         <p:nvSpPr>
-          <p:cNvPr id="3" name="Slide Number Placeholder 2"/>
+          <p:cNvPr id="4" name="Notes Placeholder 3"/>
           <p:cNvSpPr>
             <a:spLocks noGrp="1"/>
           </p:cNvSpPr>
           <p:nvPr>
-            <p:ph type="sldNum" idx="5" sz="quarter"/>
-          </p:nvPr>
-        </p:nvSpPr>
-        <p:spPr/>
-      </p:sp>
-      <p:sp>
-        <p:nvSpPr>
-          <p:cNvPr id="4" name="Notes Placeholder 3"/>
-          <p:cNvSpPr>
-            <a:spLocks noGrp="1"/>
-          </p:cNvSpPr>
-          <p:nvPr>
-            <p:ph type="body" idx="3" sz="quarter"/>
+            <p:ph type="body" sz="quarter" idx="3"/>
           </p:nvPr>
         </p:nvSpPr>
         <p:spPr/>
@@ -890,10 +888,7 @@
           <a:lstStyle/>
           <a:p>
             <a:r>
-              <a:t> The transactional.id + fencing is what makes exactly-once safe under the nastiest</a:t>
-            </a:r>
-            <a:r>
-              <a:t> failure — a process that froze, was replaced, then woke up. The zombie can't commit.</a:t>
+              <a:t> The transactional.id + fencing is what makes exactly-once safe under the nastiest failure — a process that froze, was replaced, then woke up. The zombie can't commit.</a:t>
             </a:r>
           </a:p>
         </p:txBody>
@@ -907,7 +902,7 @@
 </file>
 
 <file path=ppt/notesSlides/notesSlide3.xml><?xml version="1.0" encoding="utf-8"?>
-<p:notes xmlns:a="http://schemas.openxmlformats.org/drawingml/2006/main" xmlns:p="http://schemas.openxmlformats.org/presentationml/2006/main" xmlns:r="http://schemas.openxmlformats.org/officeDocument/2006/relationships">
+<p:notes xmlns:a="http://schemas.openxmlformats.org/drawingml/2006/main" xmlns:r="http://schemas.openxmlformats.org/officeDocument/2006/relationships" xmlns:p="http://schemas.openxmlformats.org/presentationml/2006/main">
   <p:cSld>
     <p:spTree>
       <p:nvGrpSpPr>
@@ -927,34 +922,34 @@
         <p:nvSpPr>
           <p:cNvPr id="2" name="Slide Image Placeholder 1"/>
           <p:cNvSpPr>
+            <a:spLocks noGrp="1" noRot="1" noChangeAspect="1"/>
+          </p:cNvSpPr>
+          <p:nvPr>
+            <p:ph type="sldImg" idx="2"/>
+          </p:nvPr>
+        </p:nvSpPr>
+        <p:spPr/>
+      </p:sp>
+      <p:sp>
+        <p:nvSpPr>
+          <p:cNvPr id="3" name="Slide Number Placeholder 2"/>
+          <p:cNvSpPr>
             <a:spLocks noGrp="1"/>
           </p:cNvSpPr>
           <p:nvPr>
-            <p:ph type="sldImg" idx="2"/>
+            <p:ph type="sldNum" sz="quarter" idx="5"/>
           </p:nvPr>
         </p:nvSpPr>
         <p:spPr/>
       </p:sp>
       <p:sp>
         <p:nvSpPr>
-          <p:cNvPr id="3" name="Slide Number Placeholder 2"/>
+          <p:cNvPr id="4" name="Notes Placeholder 3"/>
           <p:cNvSpPr>
             <a:spLocks noGrp="1"/>
           </p:cNvSpPr>
           <p:nvPr>
-            <p:ph type="sldNum" idx="5" sz="quarter"/>
-          </p:nvPr>
-        </p:nvSpPr>
-        <p:spPr/>
-      </p:sp>
-      <p:sp>
-        <p:nvSpPr>
-          <p:cNvPr id="4" name="Notes Placeholder 3"/>
-          <p:cNvSpPr>
-            <a:spLocks noGrp="1"/>
-          </p:cNvSpPr>
-          <p:nvPr>
-            <p:ph type="body" idx="3" sz="quarter"/>
+            <p:ph type="body" sz="quarter" idx="3"/>
           </p:nvPr>
         </p:nvSpPr>
         <p:spPr/>
@@ -1045,7 +1040,7 @@
 </file>
 
 <file path=ppt/notesSlides/notesSlide4.xml><?xml version="1.0" encoding="utf-8"?>
-<p:notes xmlns:a="http://schemas.openxmlformats.org/drawingml/2006/main" xmlns:p="http://schemas.openxmlformats.org/presentationml/2006/main" xmlns:r="http://schemas.openxmlformats.org/officeDocument/2006/relationships">
+<p:notes xmlns:a="http://schemas.openxmlformats.org/drawingml/2006/main" xmlns:r="http://schemas.openxmlformats.org/officeDocument/2006/relationships" xmlns:p="http://schemas.openxmlformats.org/presentationml/2006/main">
   <p:cSld>
     <p:spTree>
       <p:nvGrpSpPr>
@@ -1065,34 +1060,34 @@
         <p:nvSpPr>
           <p:cNvPr id="2" name="Slide Image Placeholder 1"/>
           <p:cNvSpPr>
+            <a:spLocks noGrp="1" noRot="1" noChangeAspect="1"/>
+          </p:cNvSpPr>
+          <p:nvPr>
+            <p:ph type="sldImg" idx="2"/>
+          </p:nvPr>
+        </p:nvSpPr>
+        <p:spPr/>
+      </p:sp>
+      <p:sp>
+        <p:nvSpPr>
+          <p:cNvPr id="3" name="Slide Number Placeholder 2"/>
+          <p:cNvSpPr>
             <a:spLocks noGrp="1"/>
           </p:cNvSpPr>
           <p:nvPr>
-            <p:ph type="sldImg" idx="2"/>
+            <p:ph type="sldNum" sz="quarter" idx="5"/>
           </p:nvPr>
         </p:nvSpPr>
         <p:spPr/>
       </p:sp>
       <p:sp>
         <p:nvSpPr>
-          <p:cNvPr id="3" name="Slide Number Placeholder 2"/>
+          <p:cNvPr id="4" name="Notes Placeholder 3"/>
           <p:cNvSpPr>
             <a:spLocks noGrp="1"/>
           </p:cNvSpPr>
           <p:nvPr>
-            <p:ph type="sldNum" idx="5" sz="quarter"/>
-          </p:nvPr>
-        </p:nvSpPr>
-        <p:spPr/>
-      </p:sp>
-      <p:sp>
-        <p:nvSpPr>
-          <p:cNvPr id="4" name="Notes Placeholder 3"/>
-          <p:cNvSpPr>
-            <a:spLocks noGrp="1"/>
-          </p:cNvSpPr>
-          <p:nvPr>
-            <p:ph type="body" idx="3" sz="quarter"/>
+            <p:ph type="body" sz="quarter" idx="3"/>
           </p:nvPr>
         </p:nvSpPr>
         <p:spPr/>
@@ -1101,10 +1096,7 @@
           <a:lstStyle/>
           <a:p>
             <a:r>
-              <a:t> This is why exactly-once isn't "free" — read_committed trades a little latency for</a:t>
-            </a:r>
-            <a:r>
-              <a:t> correctness. Keep transactions small and fast.</a:t>
+              <a:t> This is why exactly-once isn't "free" — read_committed trades a little latency for correctness. Keep transactions small and fast.</a:t>
             </a:r>
           </a:p>
         </p:txBody>
@@ -1118,7 +1110,7 @@
 </file>
 
 <file path=ppt/notesSlides/notesSlide5.xml><?xml version="1.0" encoding="utf-8"?>
-<p:notes xmlns:a="http://schemas.openxmlformats.org/drawingml/2006/main" xmlns:p="http://schemas.openxmlformats.org/presentationml/2006/main" xmlns:r="http://schemas.openxmlformats.org/officeDocument/2006/relationships">
+<p:notes xmlns:a="http://schemas.openxmlformats.org/drawingml/2006/main" xmlns:r="http://schemas.openxmlformats.org/officeDocument/2006/relationships" xmlns:p="http://schemas.openxmlformats.org/presentationml/2006/main">
   <p:cSld>
     <p:spTree>
       <p:nvGrpSpPr>
@@ -1138,34 +1130,34 @@
         <p:nvSpPr>
           <p:cNvPr id="2" name="Slide Image Placeholder 1"/>
           <p:cNvSpPr>
+            <a:spLocks noGrp="1" noRot="1" noChangeAspect="1"/>
+          </p:cNvSpPr>
+          <p:nvPr>
+            <p:ph type="sldImg" idx="2"/>
+          </p:nvPr>
+        </p:nvSpPr>
+        <p:spPr/>
+      </p:sp>
+      <p:sp>
+        <p:nvSpPr>
+          <p:cNvPr id="3" name="Slide Number Placeholder 2"/>
+          <p:cNvSpPr>
             <a:spLocks noGrp="1"/>
           </p:cNvSpPr>
           <p:nvPr>
-            <p:ph type="sldImg" idx="2"/>
+            <p:ph type="sldNum" sz="quarter" idx="5"/>
           </p:nvPr>
         </p:nvSpPr>
         <p:spPr/>
       </p:sp>
       <p:sp>
         <p:nvSpPr>
-          <p:cNvPr id="3" name="Slide Number Placeholder 2"/>
+          <p:cNvPr id="4" name="Notes Placeholder 3"/>
           <p:cNvSpPr>
             <a:spLocks noGrp="1"/>
           </p:cNvSpPr>
           <p:nvPr>
-            <p:ph type="sldNum" idx="5" sz="quarter"/>
-          </p:nvPr>
-        </p:nvSpPr>
-        <p:spPr/>
-      </p:sp>
-      <p:sp>
-        <p:nvSpPr>
-          <p:cNvPr id="4" name="Notes Placeholder 3"/>
-          <p:cNvSpPr>
-            <a:spLocks noGrp="1"/>
-          </p:cNvSpPr>
-          <p:nvPr>
-            <p:ph type="body" idx="3" sz="quarter"/>
+            <p:ph type="body" sz="quarter" idx="3"/>
           </p:nvPr>
         </p:nvSpPr>
         <p:spPr/>
@@ -1174,10 +1166,7 @@
           <a:lstStyle/>
           <a:p>
             <a:r>
-              <a:t> Most students will reach for exactly-once reflexively. Push back: at-least-once +</a:t>
-            </a:r>
-            <a:r>
-              <a:t> idempotency covers the majority of real systems at lower cost and complexity.</a:t>
+              <a:t> Most students will reach for exactly-once reflexively. Push back: at-least-once + idempotency covers the majority of real systems at lower cost and complexity.</a:t>
             </a:r>
           </a:p>
         </p:txBody>
@@ -2704,7 +2693,7 @@
 </file>
 
 <file path=ppt/slides/slide1.xml><?xml version="1.0" encoding="utf-8"?>
-<p:sld xmlns:a="http://schemas.openxmlformats.org/drawingml/2006/main" xmlns:p="http://schemas.openxmlformats.org/presentationml/2006/main" xmlns:r="http://schemas.openxmlformats.org/officeDocument/2006/relationships">
+<p:sld xmlns:a="http://schemas.openxmlformats.org/drawingml/2006/main" xmlns:r="http://schemas.openxmlformats.org/officeDocument/2006/relationships" xmlns:p="http://schemas.openxmlformats.org/presentationml/2006/main">
   <p:cSld>
     <p:spTree>
       <p:nvGrpSpPr>
@@ -2712,7 +2701,14 @@
         <p:cNvGrpSpPr/>
         <p:nvPr/>
       </p:nvGrpSpPr>
-      <p:grpSpPr/>
+      <p:grpSpPr>
+        <a:xfrm>
+          <a:off x="0" y="0"/>
+          <a:ext cx="0" cy="0"/>
+          <a:chOff x="0" y="0"/>
+          <a:chExt cx="0" cy="0"/>
+        </a:xfrm>
+      </p:grpSpPr>
       <p:sp>
         <p:nvSpPr>
           <p:cNvPr id="2" name="Subtitle 1"/>
@@ -2720,14 +2716,16 @@
             <a:spLocks noGrp="1"/>
           </p:cNvSpPr>
           <p:nvPr>
-            <p:ph type="subTitle" idx="1" sz="quarter"/>
+            <p:ph type="subTitle" sz="quarter" idx="1"/>
           </p:nvPr>
         </p:nvSpPr>
         <p:spPr/>
         <p:txBody>
           <a:bodyPr/>
           <a:lstStyle/>
-          <a:p/>
+          <a:p>
+            <a:endParaRPr/>
+          </a:p>
         </p:txBody>
       </p:sp>
       <p:sp>
@@ -2753,9 +2751,6 @@
               </a:rPr>
               <a:t>Intermediate 3 — Delivery Semantics &amp; Transactions</a:t>
             </a:r>
-            <a:endParaRPr sz="4200" b="1" i="0">
-              <a:latin typeface="Times New Roman"/>
-            </a:endParaRPr>
           </a:p>
         </p:txBody>
       </p:sp>
@@ -2801,7 +2796,7 @@
 </file>
 
 <file path=ppt/slides/slide10.xml><?xml version="1.0" encoding="utf-8"?>
-<p:sld xmlns:a="http://schemas.openxmlformats.org/drawingml/2006/main" xmlns:p="http://schemas.openxmlformats.org/presentationml/2006/main" xmlns:r="http://schemas.openxmlformats.org/officeDocument/2006/relationships">
+<p:sld xmlns:a="http://schemas.openxmlformats.org/drawingml/2006/main" xmlns:r="http://schemas.openxmlformats.org/officeDocument/2006/relationships" xmlns:p="http://schemas.openxmlformats.org/presentationml/2006/main">
   <p:cSld>
     <p:spTree>
       <p:nvGrpSpPr>
@@ -2809,7 +2804,14 @@
         <p:cNvGrpSpPr/>
         <p:nvPr/>
       </p:nvGrpSpPr>
-      <p:grpSpPr/>
+      <p:grpSpPr>
+        <a:xfrm>
+          <a:off x="0" y="0"/>
+          <a:ext cx="0" cy="0"/>
+          <a:chOff x="0" y="0"/>
+          <a:chExt cx="0" cy="0"/>
+        </a:xfrm>
+      </p:grpSpPr>
       <p:sp>
         <p:nvSpPr>
           <p:cNvPr id="2" name="Title 1"/>
@@ -2847,52 +2849,72 @@
           <a:lstStyle/>
           <a:p>
             <a:r>
+              <a:rPr dirty="0"/>
               <a:t> A</a:t>
             </a:r>
             <a:r>
-              <a:rPr>
+              <a:rPr dirty="0">
                 <a:latin typeface="Courier New"/>
               </a:rPr>
-              <a:t> read_committed</a:t>
-            </a:r>
-            <a:r>
+              <a:t> </a:t>
+            </a:r>
+            <a:r>
+              <a:rPr dirty="0" err="1">
+                <a:latin typeface="Courier New"/>
+              </a:rPr>
+              <a:t>read_committed</a:t>
+            </a:r>
+            <a:r>
+              <a:rPr dirty="0"/>
               <a:t> consumer relies on transaction markers the broker writes into the log.</a:t>
             </a:r>
           </a:p>
-          <a:p/>
-          <a:p/>
-          <a:p>
-            <a:r>
+          <a:p>
+            <a:endParaRPr dirty="0"/>
+          </a:p>
+          <a:p>
+            <a:endParaRPr lang="en-US" dirty="0"/>
+          </a:p>
+          <a:p>
+            <a:endParaRPr lang="en-US" dirty="0"/>
+          </a:p>
+          <a:p>
+            <a:endParaRPr dirty="0"/>
+          </a:p>
+          <a:p>
+            <a:r>
+              <a:rPr dirty="0"/>
               <a:t> The broker adds</a:t>
             </a:r>
             <a:r>
-              <a:rPr b="1"/>
+              <a:rPr b="1" dirty="0"/>
               <a:t> commit/abort markers</a:t>
             </a:r>
             <a:r>
+              <a:rPr dirty="0"/>
               <a:t> ; the consumer uses them to filter</a:t>
             </a:r>
           </a:p>
           <a:p>
             <a:r>
+              <a:rPr dirty="0"/>
               <a:t> An</a:t>
             </a:r>
             <a:r>
-              <a:rPr b="1"/>
+              <a:rPr b="1" dirty="0"/>
               <a:t> open</a:t>
             </a:r>
             <a:r>
+              <a:rPr dirty="0"/>
               <a:t> transaction holds the reader at the</a:t>
             </a:r>
             <a:r>
-              <a:rPr b="1"/>
+              <a:rPr b="1" dirty="0"/>
               <a:t> Last Stable Offset</a:t>
             </a:r>
             <a:r>
-              <a:t> until it commits or</a:t>
-            </a:r>
-            <a:r>
-              <a:t> aborts — a stuck transaction can add latency (a reason to keep transactions short)</a:t>
+              <a:rPr dirty="0"/>
+              <a:t> until it commits or aborts — a stuck transaction can add latency (a reason to keep transactions short)</a:t>
             </a:r>
           </a:p>
         </p:txBody>
@@ -2939,14 +2961,14 @@
           <p:nvPr/>
         </p:nvPicPr>
         <p:blipFill>
-          <a:blip r:embed="rId2"/>
+          <a:blip r:embed="rId3"/>
           <a:stretch>
             <a:fillRect/>
           </a:stretch>
         </p:blipFill>
         <p:spPr>
           <a:xfrm>
-            <a:off x="0" y="1792224"/>
+            <a:off x="114300" y="2396331"/>
             <a:ext cx="8915400" cy="680127"/>
           </a:xfrm>
           <a:prstGeom prst="rect">
@@ -2963,7 +2985,7 @@
 </file>
 
 <file path=ppt/slides/slide11.xml><?xml version="1.0" encoding="utf-8"?>
-<p:sld xmlns:a="http://schemas.openxmlformats.org/drawingml/2006/main" xmlns:p="http://schemas.openxmlformats.org/presentationml/2006/main" xmlns:r="http://schemas.openxmlformats.org/officeDocument/2006/relationships">
+<p:sld xmlns:a="http://schemas.openxmlformats.org/drawingml/2006/main" xmlns:r="http://schemas.openxmlformats.org/officeDocument/2006/relationships" xmlns:p="http://schemas.openxmlformats.org/presentationml/2006/main">
   <p:cSld>
     <p:spTree>
       <p:nvGrpSpPr>
@@ -2971,7 +2993,14 @@
         <p:cNvGrpSpPr/>
         <p:nvPr/>
       </p:nvGrpSpPr>
-      <p:grpSpPr/>
+      <p:grpSpPr>
+        <a:xfrm>
+          <a:off x="0" y="0"/>
+          <a:ext cx="0" cy="0"/>
+          <a:chOff x="0" y="0"/>
+          <a:chExt cx="0" cy="0"/>
+        </a:xfrm>
+      </p:grpSpPr>
       <p:sp>
         <p:nvSpPr>
           <p:cNvPr id="2" name="Title 1"/>
@@ -3021,10 +3050,7 @@
               <a:t> Exactly-once</a:t>
             </a:r>
             <a:r>
-              <a:t> within Kafka: read Kafka → process → write Kafka, atomically,</a:t>
-            </a:r>
-            <a:r>
-              <a:t> is achievable with transactions</a:t>
+              <a:t> within Kafka: read Kafka → process → write Kafka, atomically, is achievable with transactions</a:t>
             </a:r>
           </a:p>
           <a:p>
@@ -3036,10 +3062,7 @@
               <a:t> not</a:t>
             </a:r>
             <a:r>
-              <a:t> end-to-end across systems Kafka can't transact with — a write to an external</a:t>
-            </a:r>
-            <a:r>
-              <a:t> DB or a REST call is</a:t>
+              <a:t> end-to-end across systems Kafka can't transact with — a write to an external DB or a REST call is</a:t>
             </a:r>
             <a:r>
               <a:rPr b="1"/>
@@ -3058,10 +3081,7 @@
               <a:t> idempotent writes</a:t>
             </a:r>
             <a:r>
-              <a:t> (upserts, dedupe keys) — the</a:t>
-            </a:r>
-            <a:r>
-              <a:t> effectively-once pattern</a:t>
+              <a:t> (upserts, dedupe keys) — the effectively-once pattern</a:t>
             </a:r>
           </a:p>
           <a:p>
@@ -3143,7 +3163,7 @@
 </file>
 
 <file path=ppt/slides/slide12.xml><?xml version="1.0" encoding="utf-8"?>
-<p:sld xmlns:a="http://schemas.openxmlformats.org/drawingml/2006/main" xmlns:p="http://schemas.openxmlformats.org/presentationml/2006/main" xmlns:r="http://schemas.openxmlformats.org/officeDocument/2006/relationships">
+<p:sld xmlns:a="http://schemas.openxmlformats.org/drawingml/2006/main" xmlns:r="http://schemas.openxmlformats.org/officeDocument/2006/relationships" xmlns:p="http://schemas.openxmlformats.org/presentationml/2006/main">
   <p:cSld>
     <p:spTree>
       <p:nvGrpSpPr>
@@ -3151,7 +3171,14 @@
         <p:cNvGrpSpPr/>
         <p:nvPr/>
       </p:nvGrpSpPr>
-      <p:grpSpPr/>
+      <p:grpSpPr>
+        <a:xfrm>
+          <a:off x="0" y="0"/>
+          <a:ext cx="0" cy="0"/>
+          <a:chOff x="0" y="0"/>
+          <a:chExt cx="0" cy="0"/>
+        </a:xfrm>
+      </p:grpSpPr>
       <p:sp>
         <p:nvSpPr>
           <p:cNvPr id="2" name="Title 1"/>
@@ -3223,13 +3250,12 @@
               <a:t> Exactly-once (transactions)</a:t>
             </a:r>
             <a:r>
-              <a:t> — money, counts, ledgers, dedup-critical enrichment — where a</a:t>
-            </a:r>
-            <a:r>
-              <a:t> duplicate or a gap is unacceptable</a:t>
-            </a:r>
-          </a:p>
-          <a:p/>
+              <a:t> — money, counts, ledgers, dedup-critical enrichment — where a duplicate or a gap is unacceptable</a:t>
+            </a:r>
+          </a:p>
+          <a:p>
+            <a:endParaRPr/>
+          </a:p>
         </p:txBody>
       </p:sp>
       <p:sp>
@@ -3274,15 +3300,15 @@
           <p:nvPr/>
         </p:nvPicPr>
         <p:blipFill>
-          <a:blip r:embed="rId2"/>
+          <a:blip r:embed="rId3"/>
           <a:stretch>
             <a:fillRect/>
           </a:stretch>
         </p:blipFill>
         <p:spPr>
           <a:xfrm>
-            <a:off x="0" y="3986783"/>
-            <a:ext cx="10007600" cy="787400"/>
+            <a:off x="-28441" y="5263455"/>
+            <a:ext cx="9401041" cy="739676"/>
           </a:xfrm>
           <a:prstGeom prst="rect">
             <a:avLst/>
@@ -3298,7 +3324,7 @@
 </file>
 
 <file path=ppt/slides/slide13.xml><?xml version="1.0" encoding="utf-8"?>
-<p:sld xmlns:a="http://schemas.openxmlformats.org/drawingml/2006/main" xmlns:p="http://schemas.openxmlformats.org/presentationml/2006/main" xmlns:r="http://schemas.openxmlformats.org/officeDocument/2006/relationships">
+<p:sld xmlns:a="http://schemas.openxmlformats.org/drawingml/2006/main" xmlns:r="http://schemas.openxmlformats.org/officeDocument/2006/relationships" xmlns:p="http://schemas.openxmlformats.org/presentationml/2006/main">
   <p:cSld>
     <p:spTree>
       <p:nvGrpSpPr>
@@ -3306,7 +3332,14 @@
         <p:cNvGrpSpPr/>
         <p:nvPr/>
       </p:nvGrpSpPr>
-      <p:grpSpPr/>
+      <p:grpSpPr>
+        <a:xfrm>
+          <a:off x="0" y="0"/>
+          <a:ext cx="0" cy="0"/>
+          <a:chOff x="0" y="0"/>
+          <a:chExt cx="0" cy="0"/>
+        </a:xfrm>
+      </p:grpSpPr>
       <p:sp>
         <p:nvSpPr>
           <p:cNvPr id="2" name="Title 1"/>
@@ -3367,10 +3400,7 @@
               <a:t> exactly-once</a:t>
             </a:r>
             <a:r>
-              <a:t> is for</a:t>
-            </a:r>
-            <a:r>
-              <a:t> correctness-critical flows</a:t>
+              <a:t> is for correctness-critical flows</a:t>
             </a:r>
           </a:p>
           <a:p>
@@ -3393,10 +3423,7 @@
               <a:t> and</a:t>
             </a:r>
             <a:r>
-              <a:t> the offset commit</a:t>
-            </a:r>
-            <a:r>
-              <a:t> succeed or abort together</a:t>
+              <a:t> the offset commit succeed or abort together</a:t>
             </a:r>
           </a:p>
           <a:p>
@@ -3406,7 +3433,7 @@
           </a:p>
           <a:p>
             <a:r>
-              <a:rPr i="1" b="1"/>
+              <a:rPr b="1" i="1"/>
               <a:t> transactional.id</a:t>
             </a:r>
             <a:r>
@@ -3424,7 +3451,7 @@
           </a:p>
           <a:p>
             <a:r>
-              <a:rPr i="1" b="1"/>
+              <a:rPr b="1" i="1"/>
               <a:t> read_committed</a:t>
             </a:r>
             <a:r>
@@ -3491,7 +3518,7 @@
 </file>
 
 <file path=ppt/slides/slide14.xml><?xml version="1.0" encoding="utf-8"?>
-<p:sld xmlns:a="http://schemas.openxmlformats.org/drawingml/2006/main" xmlns:p="http://schemas.openxmlformats.org/presentationml/2006/main" xmlns:r="http://schemas.openxmlformats.org/officeDocument/2006/relationships">
+<p:sld xmlns:a="http://schemas.openxmlformats.org/drawingml/2006/main" xmlns:r="http://schemas.openxmlformats.org/officeDocument/2006/relationships" xmlns:p="http://schemas.openxmlformats.org/presentationml/2006/main">
   <p:cSld>
     <p:spTree>
       <p:nvGrpSpPr>
@@ -3499,7 +3526,14 @@
         <p:cNvGrpSpPr/>
         <p:nvPr/>
       </p:nvGrpSpPr>
-      <p:grpSpPr/>
+      <p:grpSpPr>
+        <a:xfrm>
+          <a:off x="0" y="0"/>
+          <a:ext cx="0" cy="0"/>
+          <a:chOff x="0" y="0"/>
+          <a:chExt cx="0" cy="0"/>
+        </a:xfrm>
+      </p:grpSpPr>
       <p:sp>
         <p:nvSpPr>
           <p:cNvPr id="2" name="Title 1"/>
@@ -3651,7 +3685,7 @@
 </file>
 
 <file path=ppt/slides/slide2.xml><?xml version="1.0" encoding="utf-8"?>
-<p:sld xmlns:a="http://schemas.openxmlformats.org/drawingml/2006/main" xmlns:p="http://schemas.openxmlformats.org/presentationml/2006/main" xmlns:r="http://schemas.openxmlformats.org/officeDocument/2006/relationships">
+<p:sld xmlns:a="http://schemas.openxmlformats.org/drawingml/2006/main" xmlns:r="http://schemas.openxmlformats.org/officeDocument/2006/relationships" xmlns:p="http://schemas.openxmlformats.org/presentationml/2006/main">
   <p:cSld>
     <p:spTree>
       <p:nvGrpSpPr>
@@ -3659,7 +3693,14 @@
         <p:cNvGrpSpPr/>
         <p:nvPr/>
       </p:nvGrpSpPr>
-      <p:grpSpPr/>
+      <p:grpSpPr>
+        <a:xfrm>
+          <a:off x="0" y="0"/>
+          <a:ext cx="0" cy="0"/>
+          <a:chOff x="0" y="0"/>
+          <a:chExt cx="0" cy="0"/>
+        </a:xfrm>
+      </p:grpSpPr>
       <p:sp>
         <p:nvSpPr>
           <p:cNvPr id="2" name="Title 1"/>
@@ -3771,7 +3812,7 @@
 </file>
 
 <file path=ppt/slides/slide3.xml><?xml version="1.0" encoding="utf-8"?>
-<p:sld xmlns:a="http://schemas.openxmlformats.org/drawingml/2006/main" xmlns:p="http://schemas.openxmlformats.org/presentationml/2006/main" xmlns:r="http://schemas.openxmlformats.org/officeDocument/2006/relationships">
+<p:sld xmlns:a="http://schemas.openxmlformats.org/drawingml/2006/main" xmlns:r="http://schemas.openxmlformats.org/officeDocument/2006/relationships" xmlns:p="http://schemas.openxmlformats.org/presentationml/2006/main">
   <p:cSld>
     <p:spTree>
       <p:nvGrpSpPr>
@@ -3779,7 +3820,14 @@
         <p:cNvGrpSpPr/>
         <p:nvPr/>
       </p:nvGrpSpPr>
-      <p:grpSpPr/>
+      <p:grpSpPr>
+        <a:xfrm>
+          <a:off x="0" y="0"/>
+          <a:ext cx="0" cy="0"/>
+          <a:chOff x="0" y="0"/>
+          <a:chExt cx="0" cy="0"/>
+        </a:xfrm>
+      </p:grpSpPr>
       <p:sp>
         <p:nvSpPr>
           <p:cNvPr id="2" name="Title 1"/>
@@ -3817,28 +3865,47 @@
           <a:lstStyle/>
           <a:p>
             <a:r>
-              <a:t> Every messaging system makes one of three promises about how many times a record is</a:t>
-            </a:r>
-            <a:r>
-              <a:t> delivered/processed:</a:t>
-            </a:r>
-          </a:p>
-          <a:p/>
-          <a:p/>
-          <a:p/>
-          <a:p/>
-          <a:p/>
-          <a:p>
-            <a:r>
+              <a:rPr dirty="0"/>
+              <a:t> Every messaging system makes one of three promises about how many times a record is delivered/processed:</a:t>
+            </a:r>
+          </a:p>
+          <a:p>
+            <a:endParaRPr dirty="0"/>
+          </a:p>
+          <a:p>
+            <a:endParaRPr dirty="0"/>
+          </a:p>
+          <a:p>
+            <a:endParaRPr dirty="0"/>
+          </a:p>
+          <a:p>
+            <a:endParaRPr dirty="0"/>
+          </a:p>
+          <a:p>
+            <a:endParaRPr lang="en-US" dirty="0"/>
+          </a:p>
+          <a:p>
+            <a:endParaRPr lang="en-US" dirty="0"/>
+          </a:p>
+          <a:p>
+            <a:endParaRPr lang="en-US" dirty="0"/>
+          </a:p>
+          <a:p>
+            <a:endParaRPr dirty="0"/>
+          </a:p>
+          <a:p>
+            <a:r>
+              <a:rPr dirty="0"/>
               <a:t> These aren't a single Kafka setting — they emerge from</a:t>
             </a:r>
             <a:r>
-              <a:rPr b="1"/>
+              <a:rPr b="1" dirty="0"/>
               <a:t> producer config + commit timing +</a:t>
             </a:r>
           </a:p>
           <a:p>
             <a:r>
+              <a:rPr dirty="0"/>
               <a:t> We've already met the first two; this module builds the third</a:t>
             </a:r>
           </a:p>
@@ -3883,11 +3950,17 @@
           <p:cNvGraphicFramePr>
             <a:graphicFrameLocks noGrp="1"/>
           </p:cNvGraphicFramePr>
-          <p:nvPr/>
+          <p:nvPr>
+            <p:extLst>
+              <p:ext uri="{D42A27DB-BD31-4B8C-83A1-F6EECF244321}">
+                <p14:modId xmlns:p14="http://schemas.microsoft.com/office/powerpoint/2010/main" val="3326171388"/>
+              </p:ext>
+            </p:extLst>
+          </p:nvPr>
         </p:nvGraphicFramePr>
         <p:xfrm>
-          <a:off x="237744" y="1792224"/>
-          <a:ext cx="8915400" cy="1828800"/>
+          <a:off x="237744" y="2132584"/>
+          <a:ext cx="8915400" cy="1737360"/>
         </p:xfrm>
         <a:graphic>
           <a:graphicData uri="http://schemas.openxmlformats.org/drawingml/2006/table">
@@ -3896,11 +3969,29 @@
                 <a:tableStyleId>{5C22544A-7EE6-4342-B048-85BDC9FD1C3A}</a:tableStyleId>
               </a:tblPr>
               <a:tblGrid>
-                <a:gridCol w="2971800"/>
-                <a:gridCol w="2971800"/>
-                <a:gridCol w="2971800"/>
+                <a:gridCol w="2971800">
+                  <a:extLst>
+                    <a:ext uri="{9D8B030D-6E8A-4147-A177-3AD203B41FA5}">
+                      <a16:colId xmlns:a16="http://schemas.microsoft.com/office/drawing/2014/main" val="20000"/>
+                    </a:ext>
+                  </a:extLst>
+                </a:gridCol>
+                <a:gridCol w="2971800">
+                  <a:extLst>
+                    <a:ext uri="{9D8B030D-6E8A-4147-A177-3AD203B41FA5}">
+                      <a16:colId xmlns:a16="http://schemas.microsoft.com/office/drawing/2014/main" val="20001"/>
+                    </a:ext>
+                  </a:extLst>
+                </a:gridCol>
+                <a:gridCol w="2971800">
+                  <a:extLst>
+                    <a:ext uri="{9D8B030D-6E8A-4147-A177-3AD203B41FA5}">
+                      <a16:colId xmlns:a16="http://schemas.microsoft.com/office/drawing/2014/main" val="20002"/>
+                    </a:ext>
+                  </a:extLst>
+                </a:gridCol>
               </a:tblGrid>
-              <a:tr h="457200">
+              <a:tr h="0">
                 <a:tc>
                   <a:txBody>
                     <a:bodyPr/>
@@ -3937,6 +4028,11 @@
                   </a:txBody>
                   <a:tcPr/>
                 </a:tc>
+                <a:extLst>
+                  <a:ext uri="{0D108BD9-81ED-4DB2-BD59-A6C34878D82A}">
+                    <a16:rowId xmlns:a16="http://schemas.microsoft.com/office/drawing/2014/main" val="10000"/>
+                  </a:ext>
+                </a:extLst>
               </a:tr>
               <a:tr h="457200">
                 <a:tc>
@@ -3945,14 +4041,8 @@
                     <a:lstStyle/>
                     <a:p>
                       <a:r>
-                        <a:t/>
-                      </a:r>
-                      <a:r>
                         <a:rPr b="1"/>
                         <a:t>At-most-once</a:t>
-                      </a:r>
-                      <a:r>
-                        <a:t/>
                       </a:r>
                     </a:p>
                   </a:txBody>
@@ -3989,6 +4079,11 @@
                   </a:txBody>
                   <a:tcPr/>
                 </a:tc>
+                <a:extLst>
+                  <a:ext uri="{0D108BD9-81ED-4DB2-BD59-A6C34878D82A}">
+                    <a16:rowId xmlns:a16="http://schemas.microsoft.com/office/drawing/2014/main" val="10001"/>
+                  </a:ext>
+                </a:extLst>
               </a:tr>
               <a:tr h="457200">
                 <a:tc>
@@ -3997,14 +4092,8 @@
                     <a:lstStyle/>
                     <a:p>
                       <a:r>
-                        <a:t/>
-                      </a:r>
-                      <a:r>
                         <a:rPr b="1"/>
                         <a:t>At-least-once</a:t>
-                      </a:r>
-                      <a:r>
-                        <a:t/>
                       </a:r>
                     </a:p>
                   </a:txBody>
@@ -4041,6 +4130,11 @@
                   </a:txBody>
                   <a:tcPr/>
                 </a:tc>
+                <a:extLst>
+                  <a:ext uri="{0D108BD9-81ED-4DB2-BD59-A6C34878D82A}">
+                    <a16:rowId xmlns:a16="http://schemas.microsoft.com/office/drawing/2014/main" val="10002"/>
+                  </a:ext>
+                </a:extLst>
               </a:tr>
               <a:tr h="457200">
                 <a:tc>
@@ -4049,14 +4143,8 @@
                     <a:lstStyle/>
                     <a:p>
                       <a:r>
-                        <a:t/>
-                      </a:r>
-                      <a:r>
                         <a:rPr b="1"/>
                         <a:t>Exactly-once</a:t>
-                      </a:r>
-                      <a:r>
-                        <a:t/>
                       </a:r>
                     </a:p>
                   </a:txBody>
@@ -4080,12 +4168,18 @@
                     <a:lstStyle/>
                     <a:p>
                       <a:r>
+                        <a:rPr dirty="0"/>
                         <a:t>neither loss nor duplication</a:t>
                       </a:r>
                     </a:p>
                   </a:txBody>
                   <a:tcPr/>
                 </a:tc>
+                <a:extLst>
+                  <a:ext uri="{0D108BD9-81ED-4DB2-BD59-A6C34878D82A}">
+                    <a16:rowId xmlns:a16="http://schemas.microsoft.com/office/drawing/2014/main" val="10003"/>
+                  </a:ext>
+                </a:extLst>
               </a:tr>
             </a:tbl>
           </a:graphicData>
@@ -4100,7 +4194,7 @@
 </file>
 
 <file path=ppt/slides/slide4.xml><?xml version="1.0" encoding="utf-8"?>
-<p:sld xmlns:a="http://schemas.openxmlformats.org/drawingml/2006/main" xmlns:p="http://schemas.openxmlformats.org/presentationml/2006/main" xmlns:r="http://schemas.openxmlformats.org/officeDocument/2006/relationships">
+<p:sld xmlns:a="http://schemas.openxmlformats.org/drawingml/2006/main" xmlns:r="http://schemas.openxmlformats.org/officeDocument/2006/relationships" xmlns:p="http://schemas.openxmlformats.org/presentationml/2006/main">
   <p:cSld>
     <p:spTree>
       <p:nvGrpSpPr>
@@ -4108,7 +4202,14 @@
         <p:cNvGrpSpPr/>
         <p:nvPr/>
       </p:nvGrpSpPr>
-      <p:grpSpPr/>
+      <p:grpSpPr>
+        <a:xfrm>
+          <a:off x="0" y="0"/>
+          <a:ext cx="0" cy="0"/>
+          <a:chOff x="0" y="0"/>
+          <a:chExt cx="0" cy="0"/>
+        </a:xfrm>
+      </p:grpSpPr>
       <p:sp>
         <p:nvSpPr>
           <p:cNvPr id="2" name="Title 1"/>
@@ -4187,10 +4288,7 @@
               <a:t> after</a:t>
             </a:r>
             <a:r>
-              <a:t> processing → no loss, possible</a:t>
-            </a:r>
-            <a:r>
-              <a:t> dups (Lab 02 + Lab 03)</a:t>
+              <a:t> processing → no loss, possible dups (Lab 02 + Lab 03)</a:t>
             </a:r>
           </a:p>
           <a:p>
@@ -4218,10 +4316,7 @@
               <a:t> consume → process → produce</a:t>
             </a:r>
             <a:r>
-              <a:t> step atomic, so the output and</a:t>
-            </a:r>
-            <a:r>
-              <a:t> the input-offset commit either</a:t>
+              <a:t> step atomic, so the output and the input-offset commit either</a:t>
             </a:r>
             <a:r>
               <a:rPr b="1"/>
@@ -4289,7 +4384,7 @@
 </file>
 
 <file path=ppt/slides/slide5.xml><?xml version="1.0" encoding="utf-8"?>
-<p:sld xmlns:a="http://schemas.openxmlformats.org/drawingml/2006/main" xmlns:p="http://schemas.openxmlformats.org/presentationml/2006/main" xmlns:r="http://schemas.openxmlformats.org/officeDocument/2006/relationships">
+<p:sld xmlns:a="http://schemas.openxmlformats.org/drawingml/2006/main" xmlns:r="http://schemas.openxmlformats.org/officeDocument/2006/relationships" xmlns:p="http://schemas.openxmlformats.org/presentationml/2006/main">
   <p:cSld>
     <p:spTree>
       <p:nvGrpSpPr>
@@ -4297,7 +4392,14 @@
         <p:cNvGrpSpPr/>
         <p:nvPr/>
       </p:nvGrpSpPr>
-      <p:grpSpPr/>
+      <p:grpSpPr>
+        <a:xfrm>
+          <a:off x="0" y="0"/>
+          <a:ext cx="0" cy="0"/>
+          <a:chOff x="0" y="0"/>
+          <a:chExt cx="0" cy="0"/>
+        </a:xfrm>
+      </p:grpSpPr>
       <p:sp>
         <p:nvSpPr>
           <p:cNvPr id="2" name="Title 1"/>
@@ -4335,82 +4437,104 @@
           <a:lstStyle/>
           <a:p>
             <a:r>
-              <a:t> A stream processor reads from one topic, transforms, and writes to another — then commits its</a:t>
-            </a:r>
-            <a:r>
-              <a:t> read offset. Two writes that must agree:</a:t>
-            </a:r>
-          </a:p>
-          <a:p/>
-          <a:p>
-            <a:r>
+              <a:rPr dirty="0"/>
+              <a:t> A stream processor reads from one topic, transforms, and writes to another — then commits its read offset. Two writes that must agree:</a:t>
+            </a:r>
+          </a:p>
+          <a:p>
+            <a:endParaRPr lang="en-US" dirty="0"/>
+          </a:p>
+          <a:p>
+            <a:endParaRPr lang="en-US" dirty="0"/>
+          </a:p>
+          <a:p>
+            <a:endParaRPr lang="en-US" dirty="0"/>
+          </a:p>
+          <a:p>
+            <a:endParaRPr lang="en-US" dirty="0"/>
+          </a:p>
+          <a:p>
+            <a:endParaRPr dirty="0"/>
+          </a:p>
+          <a:p>
+            <a:r>
+              <a:rPr dirty="0"/>
               <a:t> Crash</a:t>
             </a:r>
             <a:r>
-              <a:rPr b="1"/>
+              <a:rPr b="1" dirty="0"/>
               <a:t> after</a:t>
             </a:r>
             <a:r>
+              <a:rPr dirty="0"/>
               <a:t> writing output but</a:t>
             </a:r>
             <a:r>
-              <a:rPr b="1"/>
+              <a:rPr b="1" dirty="0"/>
               <a:t> before</a:t>
             </a:r>
             <a:r>
+              <a:rPr dirty="0"/>
               <a:t> committing the offset → on restart you</a:t>
             </a:r>
             <a:r>
-              <a:rPr b="1"/>
+              <a:rPr b="1" dirty="0"/>
               <a:t> re-read and re-write</a:t>
             </a:r>
             <a:r>
+              <a:rPr dirty="0"/>
               <a:t> →</a:t>
             </a:r>
             <a:r>
-              <a:rPr b="1"/>
+              <a:rPr b="1" dirty="0"/>
               <a:t> duplicate output</a:t>
             </a:r>
           </a:p>
           <a:p>
             <a:r>
+              <a:rPr dirty="0"/>
               <a:t> Crash</a:t>
             </a:r>
             <a:r>
-              <a:rPr b="1"/>
+              <a:rPr b="1" dirty="0"/>
               <a:t> after</a:t>
             </a:r>
             <a:r>
+              <a:rPr dirty="0"/>
               <a:t> committing the offset but</a:t>
             </a:r>
             <a:r>
-              <a:rPr b="1"/>
+              <a:rPr b="1" dirty="0"/>
               <a:t> before</a:t>
             </a:r>
             <a:r>
+              <a:rPr dirty="0"/>
               <a:t> writing →</a:t>
             </a:r>
             <a:r>
-              <a:rPr b="1"/>
+              <a:rPr b="1" dirty="0"/>
               <a:t> lost output</a:t>
             </a:r>
           </a:p>
           <a:p>
             <a:r>
+              <a:rPr dirty="0"/>
               <a:t> Idempotence alone can't fix this — it spans</a:t>
             </a:r>
             <a:r>
-              <a:rPr b="1"/>
+              <a:rPr b="1" dirty="0"/>
               <a:t> two different topics/partitions plus an offset</a:t>
             </a:r>
             <a:r>
+              <a:rPr dirty="0"/>
               <a:t> . You need them to be</a:t>
             </a:r>
             <a:r>
-              <a:rPr b="1"/>
+              <a:rPr b="1" dirty="0"/>
               <a:t> one atomic unit</a:t>
             </a:r>
             <a:r>
+              <a:rPr dirty="0"/>
               <a:t> .</a:t>
             </a:r>
           </a:p>
@@ -4465,7 +4589,7 @@
         </p:blipFill>
         <p:spPr>
           <a:xfrm>
-            <a:off x="0" y="1792224"/>
+            <a:off x="5903" y="2777331"/>
             <a:ext cx="9398000" cy="787400"/>
           </a:xfrm>
           <a:prstGeom prst="rect">
@@ -4482,7 +4606,7 @@
 </file>
 
 <file path=ppt/slides/slide6.xml><?xml version="1.0" encoding="utf-8"?>
-<p:sld xmlns:a="http://schemas.openxmlformats.org/drawingml/2006/main" xmlns:p="http://schemas.openxmlformats.org/presentationml/2006/main" xmlns:r="http://schemas.openxmlformats.org/officeDocument/2006/relationships">
+<p:sld xmlns:a="http://schemas.openxmlformats.org/drawingml/2006/main" xmlns:r="http://schemas.openxmlformats.org/officeDocument/2006/relationships" xmlns:p="http://schemas.openxmlformats.org/presentationml/2006/main">
   <p:cSld>
     <p:spTree>
       <p:nvGrpSpPr>
@@ -4490,7 +4614,14 @@
         <p:cNvGrpSpPr/>
         <p:nvPr/>
       </p:nvGrpSpPr>
-      <p:grpSpPr/>
+      <p:grpSpPr>
+        <a:xfrm>
+          <a:off x="0" y="0"/>
+          <a:ext cx="0" cy="0"/>
+          <a:chOff x="0" y="0"/>
+          <a:chExt cx="0" cy="0"/>
+        </a:xfrm>
+      </p:grpSpPr>
       <p:sp>
         <p:nvSpPr>
           <p:cNvPr id="2" name="Title 1"/>
@@ -4528,72 +4659,99 @@
           <a:lstStyle/>
           <a:p>
             <a:r>
+              <a:rPr dirty="0"/>
               <a:t> A transaction groups</a:t>
             </a:r>
             <a:r>
-              <a:rPr b="1"/>
+              <a:rPr b="1" dirty="0"/>
               <a:t> multiple produces across partitions</a:t>
             </a:r>
             <a:r>
+              <a:rPr dirty="0"/>
               <a:t> </a:t>
             </a:r>
             <a:r>
-              <a:rPr i="1"/>
+              <a:rPr i="1" dirty="0"/>
               <a:t> and</a:t>
             </a:r>
             <a:r>
+              <a:rPr dirty="0"/>
               <a:t> the</a:t>
             </a:r>
             <a:r>
-              <a:rPr b="1"/>
+              <a:rPr b="1" dirty="0"/>
               <a:t> consumer offset</a:t>
             </a:r>
             <a:r>
+              <a:rPr dirty="0"/>
               <a:t> into one all-or-nothing operation.</a:t>
             </a:r>
           </a:p>
-          <a:p/>
-          <a:p/>
-          <a:p>
-            <a:r>
+          <a:p>
+            <a:endParaRPr dirty="0"/>
+          </a:p>
+          <a:p>
+            <a:endParaRPr lang="en-US" dirty="0"/>
+          </a:p>
+          <a:p>
+            <a:endParaRPr lang="en-US" dirty="0"/>
+          </a:p>
+          <a:p>
+            <a:endParaRPr lang="en-US" dirty="0"/>
+          </a:p>
+          <a:p>
+            <a:endParaRPr lang="en-US" dirty="0"/>
+          </a:p>
+          <a:p>
+            <a:endParaRPr dirty="0"/>
+          </a:p>
+          <a:p>
+            <a:r>
+              <a:rPr dirty="0"/>
               <a:t> Either</a:t>
             </a:r>
             <a:r>
-              <a:rPr b="1"/>
+              <a:rPr b="1" dirty="0"/>
               <a:t> everything commits</a:t>
             </a:r>
             <a:r>
+              <a:rPr dirty="0"/>
               <a:t> (outputs appear, offset advances) or</a:t>
             </a:r>
             <a:r>
-              <a:rPr b="1"/>
+              <a:rPr b="1" dirty="0"/>
               <a:t> everything aborts</a:t>
             </a:r>
             <a:r>
+              <a:rPr dirty="0"/>
               <a:t> (outputs discarded, offset unchanged — safe to retry)</a:t>
             </a:r>
           </a:p>
           <a:p>
             <a:r>
+              <a:rPr dirty="0"/>
               <a:t> Built on the</a:t>
             </a:r>
             <a:r>
-              <a:rPr b="1"/>
+              <a:rPr b="1" dirty="0"/>
               <a:t> idempotent producer</a:t>
             </a:r>
             <a:r>
+              <a:rPr dirty="0"/>
               <a:t> (transactions require it)</a:t>
             </a:r>
           </a:p>
           <a:p>
             <a:r>
+              <a:rPr dirty="0"/>
               <a:t> Enables</a:t>
             </a:r>
             <a:r>
-              <a:rPr b="1"/>
+              <a:rPr b="1" dirty="0"/>
               <a:t> exactly-once processing</a:t>
             </a:r>
             <a:r>
+              <a:rPr dirty="0"/>
               <a:t> for consume-process-produce pipelines</a:t>
             </a:r>
           </a:p>
@@ -4648,7 +4806,7 @@
         </p:blipFill>
         <p:spPr>
           <a:xfrm>
-            <a:off x="0" y="1353312"/>
+            <a:off x="20928" y="2472531"/>
             <a:ext cx="8915400" cy="1180535"/>
           </a:xfrm>
           <a:prstGeom prst="rect">
@@ -4665,7 +4823,7 @@
 </file>
 
 <file path=ppt/slides/slide7.xml><?xml version="1.0" encoding="utf-8"?>
-<p:sld xmlns:a="http://schemas.openxmlformats.org/drawingml/2006/main" xmlns:p="http://schemas.openxmlformats.org/presentationml/2006/main" xmlns:r="http://schemas.openxmlformats.org/officeDocument/2006/relationships">
+<p:sld xmlns:a="http://schemas.openxmlformats.org/drawingml/2006/main" xmlns:r="http://schemas.openxmlformats.org/officeDocument/2006/relationships" xmlns:p="http://schemas.openxmlformats.org/presentationml/2006/main">
   <p:cSld>
     <p:spTree>
       <p:nvGrpSpPr>
@@ -4673,7 +4831,14 @@
         <p:cNvGrpSpPr/>
         <p:nvPr/>
       </p:nvGrpSpPr>
-      <p:grpSpPr/>
+      <p:grpSpPr>
+        <a:xfrm>
+          <a:off x="0" y="0"/>
+          <a:ext cx="0" cy="0"/>
+          <a:chOff x="0" y="0"/>
+          <a:chExt cx="0" cy="0"/>
+        </a:xfrm>
+      </p:grpSpPr>
       <p:sp>
         <p:nvSpPr>
           <p:cNvPr id="2" name="Title 1"/>
@@ -4711,56 +4876,445 @@
           <a:lstStyle/>
           <a:p>
             <a:r>
+              <a:rPr dirty="0"/>
               <a:t> Transactions need a stable</a:t>
             </a:r>
           </a:p>
           <a:p>
             <a:r>
-              <a:rPr i="1" b="1"/>
-              <a:t> transactional.id</a:t>
-            </a:r>
-            <a:r>
-              <a:t> — the producer's durable identity across</a:t>
-            </a:r>
-            <a:r>
-              <a:t> restarts.</a:t>
-            </a:r>
-          </a:p>
-          <a:p/>
-          <a:p/>
-          <a:p/>
-          <a:p>
-            <a:r>
+              <a:rPr b="1" i="1" dirty="0"/>
+              <a:t> </a:t>
+            </a:r>
+            <a:r>
+              <a:rPr b="1" i="1" dirty="0" err="1"/>
+              <a:t>transactional.id</a:t>
+            </a:r>
+            <a:r>
+              <a:rPr dirty="0"/>
+              <a:t> — the producer's durable identity across restarts.</a:t>
+            </a:r>
+          </a:p>
+          <a:p>
+            <a:endParaRPr dirty="0"/>
+          </a:p>
+          <a:p>
+            <a:endParaRPr lang="en-US" dirty="0"/>
+          </a:p>
+          <a:p>
+            <a:endParaRPr lang="en-US" dirty="0"/>
+          </a:p>
+          <a:p>
+            <a:endParaRPr lang="en-US" dirty="0"/>
+          </a:p>
+          <a:p>
+            <a:endParaRPr dirty="0"/>
+          </a:p>
+          <a:p>
+            <a:endParaRPr dirty="0"/>
+          </a:p>
+          <a:p>
+            <a:r>
+              <a:rPr dirty="0"/>
               <a:t> It lets Kafka</a:t>
             </a:r>
             <a:r>
+              <a:rPr b="1" dirty="0"/>
+              <a:t> fence</a:t>
+            </a:r>
+            <a:r>
+              <a:rPr dirty="0"/>
+              <a:t> a previous (possibly zombie) instance with the same id — the old one can no longer commit, so a hung-then-recovered process can't corrupt output</a:t>
+            </a:r>
+          </a:p>
+          <a:p>
+            <a:r>
+              <a:rPr dirty="0"/>
+              <a:t> Must be</a:t>
+            </a:r>
+            <a:r>
+              <a:rPr b="1" dirty="0"/>
+              <a:t> stable per logical processor</a:t>
+            </a:r>
+            <a:r>
+              <a:rPr dirty="0"/>
+              <a:t> and</a:t>
+            </a:r>
+            <a:r>
+              <a:rPr b="1" dirty="0"/>
+              <a:t> unique per instance</a:t>
+            </a:r>
+            <a:r>
+              <a:rPr dirty="0"/>
+              <a:t> in a parallel deployment</a:t>
+            </a:r>
+          </a:p>
+        </p:txBody>
+      </p:sp>
+      <p:sp>
+        <p:nvSpPr>
+          <p:cNvPr id="4" name="TextBox 3"/>
+          <p:cNvSpPr txBox="1"/>
+          <p:nvPr/>
+        </p:nvSpPr>
+        <p:spPr>
+          <a:xfrm>
+            <a:off x="704088" y="8065008"/>
+            <a:ext cx="8915400" cy="228600"/>
+          </a:xfrm>
+          <a:prstGeom prst="rect">
+            <a:avLst/>
+          </a:prstGeom>
+          <a:noFill/>
+        </p:spPr>
+        <p:txBody>
+          <a:bodyPr wrap="none">
+            <a:spAutoFit/>
+          </a:bodyPr>
+          <a:lstStyle/>
+          <a:p>
+            <a:r>
+              <a:rPr sz="800">
+                <a:solidFill>
+                  <a:srgbClr val="000000"/>
+                </a:solidFill>
+              </a:rPr>
+              <a:t>Copyright © 2026 by Elephant Scale, All Rights Reserved</a:t>
+            </a:r>
+          </a:p>
+        </p:txBody>
+      </p:sp>
+      <p:pic>
+        <p:nvPicPr>
+          <p:cNvPr id="5" name="Picture 4" descr="1.png"/>
+          <p:cNvPicPr>
+            <a:picLocks noChangeAspect="1"/>
+          </p:cNvPicPr>
+          <p:nvPr/>
+        </p:nvPicPr>
+        <p:blipFill>
+          <a:blip r:embed="rId3"/>
+          <a:stretch>
+            <a:fillRect/>
+          </a:stretch>
+        </p:blipFill>
+        <p:spPr>
+          <a:xfrm>
+            <a:off x="0" y="2777331"/>
+            <a:ext cx="8915400" cy="1196842"/>
+          </a:xfrm>
+          <a:prstGeom prst="rect">
+            <a:avLst/>
+          </a:prstGeom>
+        </p:spPr>
+      </p:pic>
+    </p:spTree>
+  </p:cSld>
+  <p:clrMapOvr>
+    <a:masterClrMapping/>
+  </p:clrMapOvr>
+</p:sld>
+</file>
+
+<file path=ppt/slides/slide8.xml><?xml version="1.0" encoding="utf-8"?>
+<p:sld xmlns:a="http://schemas.openxmlformats.org/drawingml/2006/main" xmlns:r="http://schemas.openxmlformats.org/officeDocument/2006/relationships" xmlns:p="http://schemas.openxmlformats.org/presentationml/2006/main">
+  <p:cSld>
+    <p:spTree>
+      <p:nvGrpSpPr>
+        <p:cNvPr id="1" name=""/>
+        <p:cNvGrpSpPr/>
+        <p:nvPr/>
+      </p:nvGrpSpPr>
+      <p:grpSpPr>
+        <a:xfrm>
+          <a:off x="0" y="0"/>
+          <a:ext cx="0" cy="0"/>
+          <a:chOff x="0" y="0"/>
+          <a:chExt cx="0" cy="0"/>
+        </a:xfrm>
+      </p:grpSpPr>
+      <p:sp>
+        <p:nvSpPr>
+          <p:cNvPr id="2" name="Title 1"/>
+          <p:cNvSpPr>
+            <a:spLocks noGrp="1"/>
+          </p:cNvSpPr>
+          <p:nvPr>
+            <p:ph type="title"/>
+          </p:nvPr>
+        </p:nvSpPr>
+        <p:spPr/>
+        <p:txBody>
+          <a:bodyPr/>
+          <a:lstStyle/>
+          <a:p>
+            <a:r>
+              <a:t>The Consume-Process-Produce Loop</a:t>
+            </a:r>
+          </a:p>
+        </p:txBody>
+      </p:sp>
+      <p:sp>
+        <p:nvSpPr>
+          <p:cNvPr id="3" name="Content Placeholder 2"/>
+          <p:cNvSpPr>
+            <a:spLocks noGrp="1"/>
+          </p:cNvSpPr>
+          <p:nvPr>
+            <p:ph idx="1"/>
+          </p:nvPr>
+        </p:nvSpPr>
+        <p:spPr/>
+        <p:txBody>
+          <a:bodyPr/>
+          <a:lstStyle/>
+          <a:p>
+            <a:r>
+              <a:rPr dirty="0"/>
+              <a:t> The canonical exactly-once pattern, end to end:</a:t>
+            </a:r>
+          </a:p>
+          <a:p>
+            <a:endParaRPr dirty="0"/>
+          </a:p>
+          <a:p>
+            <a:endParaRPr dirty="0"/>
+          </a:p>
+          <a:p>
+            <a:endParaRPr dirty="0"/>
+          </a:p>
+          <a:p>
+            <a:endParaRPr dirty="0"/>
+          </a:p>
+          <a:p>
+            <a:endParaRPr lang="en-US" dirty="0"/>
+          </a:p>
+          <a:p>
+            <a:endParaRPr lang="en-US" dirty="0"/>
+          </a:p>
+          <a:p>
+            <a:endParaRPr dirty="0"/>
+          </a:p>
+          <a:p>
+            <a:endParaRPr dirty="0"/>
+          </a:p>
+          <a:p>
+            <a:endParaRPr dirty="0"/>
+          </a:p>
+          <a:p>
+            <a:r>
+              <a:rPr dirty="0"/>
+              <a:t> The consumer runs with</a:t>
+            </a:r>
+          </a:p>
+          <a:p>
+            <a:r>
+              <a:rPr b="1" i="1" dirty="0"/>
+              <a:t> </a:t>
+            </a:r>
+            <a:r>
+              <a:rPr b="1" i="1" dirty="0" err="1"/>
+              <a:t>enable.auto.commit</a:t>
+            </a:r>
+            <a:r>
+              <a:rPr b="1" i="1" dirty="0"/>
+              <a:t>=false</a:t>
+            </a:r>
+            <a:r>
+              <a:rPr dirty="0"/>
+              <a:t> — offsets are committed</a:t>
+            </a:r>
+            <a:r>
+              <a:rPr b="1" dirty="0"/>
+              <a:t> only via the</a:t>
+            </a:r>
+          </a:p>
+          <a:p>
+            <a:r>
+              <a:rPr dirty="0"/>
+              <a:t> Output records and the input-offset advance are now</a:t>
+            </a:r>
+            <a:r>
+              <a:rPr b="1" dirty="0"/>
+              <a:t> one atomic fact</a:t>
+            </a:r>
+          </a:p>
+        </p:txBody>
+      </p:sp>
+      <p:sp>
+        <p:nvSpPr>
+          <p:cNvPr id="4" name="TextBox 3"/>
+          <p:cNvSpPr txBox="1"/>
+          <p:nvPr/>
+        </p:nvSpPr>
+        <p:spPr>
+          <a:xfrm>
+            <a:off x="704088" y="8065008"/>
+            <a:ext cx="8915400" cy="228600"/>
+          </a:xfrm>
+          <a:prstGeom prst="rect">
+            <a:avLst/>
+          </a:prstGeom>
+          <a:noFill/>
+        </p:spPr>
+        <p:txBody>
+          <a:bodyPr wrap="none">
+            <a:spAutoFit/>
+          </a:bodyPr>
+          <a:lstStyle/>
+          <a:p>
+            <a:r>
+              <a:rPr sz="800">
+                <a:solidFill>
+                  <a:srgbClr val="000000"/>
+                </a:solidFill>
+              </a:rPr>
+              <a:t>Copyright © 2026 by Elephant Scale, All Rights Reserved</a:t>
+            </a:r>
+          </a:p>
+        </p:txBody>
+      </p:sp>
+      <p:pic>
+        <p:nvPicPr>
+          <p:cNvPr id="5" name="Picture 4" descr="1.png"/>
+          <p:cNvPicPr>
+            <a:picLocks noChangeAspect="1"/>
+          </p:cNvPicPr>
+          <p:nvPr/>
+        </p:nvPicPr>
+        <p:blipFill>
+          <a:blip r:embed="rId3"/>
+          <a:stretch>
+            <a:fillRect/>
+          </a:stretch>
+        </p:blipFill>
+        <p:spPr>
+          <a:xfrm>
+            <a:off x="180794" y="1634331"/>
+            <a:ext cx="8915400" cy="3774104"/>
+          </a:xfrm>
+          <a:prstGeom prst="rect">
+            <a:avLst/>
+          </a:prstGeom>
+        </p:spPr>
+      </p:pic>
+    </p:spTree>
+  </p:cSld>
+  <p:clrMapOvr>
+    <a:masterClrMapping/>
+  </p:clrMapOvr>
+</p:sld>
+</file>
+
+<file path=ppt/slides/slide9.xml><?xml version="1.0" encoding="utf-8"?>
+<p:sld xmlns:a="http://schemas.openxmlformats.org/drawingml/2006/main" xmlns:r="http://schemas.openxmlformats.org/officeDocument/2006/relationships" xmlns:p="http://schemas.openxmlformats.org/presentationml/2006/main">
+  <p:cSld>
+    <p:spTree>
+      <p:nvGrpSpPr>
+        <p:cNvPr id="1" name=""/>
+        <p:cNvGrpSpPr/>
+        <p:nvPr/>
+      </p:nvGrpSpPr>
+      <p:grpSpPr>
+        <a:xfrm>
+          <a:off x="0" y="0"/>
+          <a:ext cx="0" cy="0"/>
+          <a:chOff x="0" y="0"/>
+          <a:chExt cx="0" cy="0"/>
+        </a:xfrm>
+      </p:grpSpPr>
+      <p:sp>
+        <p:nvSpPr>
+          <p:cNvPr id="2" name="Title 1"/>
+          <p:cNvSpPr>
+            <a:spLocks noGrp="1"/>
+          </p:cNvSpPr>
+          <p:nvPr>
+            <p:ph type="title"/>
+          </p:nvPr>
+        </p:nvSpPr>
+        <p:spPr/>
+        <p:txBody>
+          <a:bodyPr/>
+          <a:lstStyle/>
+          <a:p>
+            <a:r>
+              <a:t>The Consumer Side: </a:t>
+            </a:r>
+          </a:p>
+        </p:txBody>
+      </p:sp>
+      <p:sp>
+        <p:nvSpPr>
+          <p:cNvPr id="3" name="Content Placeholder 2"/>
+          <p:cNvSpPr>
+            <a:spLocks noGrp="1"/>
+          </p:cNvSpPr>
+          <p:nvPr>
+            <p:ph idx="1"/>
+          </p:nvPr>
+        </p:nvSpPr>
+        <p:spPr/>
+        <p:txBody>
+          <a:bodyPr/>
+          <a:lstStyle/>
+          <a:p>
+            <a:r>
+              <a:t> Transactions on the write side only deliver exactly-once if the</a:t>
+            </a:r>
+            <a:r>
               <a:rPr b="1"/>
-              <a:t> fence</a:t>
-            </a:r>
-            <a:r>
-              <a:t> a previous (possibly zombie) instance with the same id — the old one</a:t>
-            </a:r>
-            <a:r>
-              <a:t> can no longer commit, so a hung-then-recovered process can't corrupt output</a:t>
-            </a:r>
-          </a:p>
-          <a:p>
-            <a:r>
-              <a:t> Must be</a:t>
+              <a:t> reader</a:t>
+            </a:r>
+            <a:r>
+              <a:t> agrees to ignore uncommitted/aborted data.</a:t>
+            </a:r>
+          </a:p>
+          <a:p>
+            <a:endParaRPr/>
+          </a:p>
+          <a:p>
+            <a:endParaRPr/>
+          </a:p>
+          <a:p>
+            <a:endParaRPr/>
+          </a:p>
+          <a:p>
+            <a:endParaRPr/>
+          </a:p>
+          <a:p>
+            <a:endParaRPr/>
+          </a:p>
+          <a:p>
+            <a:endParaRPr/>
+          </a:p>
+          <a:p>
+            <a:endParaRPr/>
+          </a:p>
+          <a:p>
+            <a:r>
+              <a:rPr>
+                <a:latin typeface="Courier New"/>
+              </a:rPr>
+              <a:t> read_committed</a:t>
+            </a:r>
+            <a:r>
+              <a:t> readers</a:t>
             </a:r>
             <a:r>
               <a:rPr b="1"/>
-              <a:t> stable per logical processor</a:t>
-            </a:r>
-            <a:r>
-              <a:t> and</a:t>
+              <a:t> never see aborted output</a:t>
+            </a:r>
+            <a:r>
+              <a:t> and won't read past an open transaction on that partition until it resolves</a:t>
+            </a:r>
+          </a:p>
+          <a:p>
+            <a:r>
+              <a:t> Exactly-once end to end =</a:t>
             </a:r>
             <a:r>
               <a:rPr b="1"/>
-              <a:t> unique per instance</a:t>
-            </a:r>
-            <a:r>
-              <a:t> in a parallel deployment</a:t>
+              <a:t> transactional producer +</a:t>
             </a:r>
           </a:p>
         </p:txBody>
@@ -4814,323 +5368,8 @@
         </p:blipFill>
         <p:spPr>
           <a:xfrm>
-            <a:off x="0" y="1792224"/>
-            <a:ext cx="8915400" cy="1196842"/>
-          </a:xfrm>
-          <a:prstGeom prst="rect">
-            <a:avLst/>
-          </a:prstGeom>
-        </p:spPr>
-      </p:pic>
-    </p:spTree>
-  </p:cSld>
-  <p:clrMapOvr>
-    <a:masterClrMapping/>
-  </p:clrMapOvr>
-</p:sld>
-</file>
-
-<file path=ppt/slides/slide8.xml><?xml version="1.0" encoding="utf-8"?>
-<p:sld xmlns:a="http://schemas.openxmlformats.org/drawingml/2006/main" xmlns:p="http://schemas.openxmlformats.org/presentationml/2006/main" xmlns:r="http://schemas.openxmlformats.org/officeDocument/2006/relationships">
-  <p:cSld>
-    <p:spTree>
-      <p:nvGrpSpPr>
-        <p:cNvPr id="1" name=""/>
-        <p:cNvGrpSpPr/>
-        <p:nvPr/>
-      </p:nvGrpSpPr>
-      <p:grpSpPr/>
-      <p:sp>
-        <p:nvSpPr>
-          <p:cNvPr id="2" name="Title 1"/>
-          <p:cNvSpPr>
-            <a:spLocks noGrp="1"/>
-          </p:cNvSpPr>
-          <p:nvPr>
-            <p:ph type="title"/>
-          </p:nvPr>
-        </p:nvSpPr>
-        <p:spPr/>
-        <p:txBody>
-          <a:bodyPr/>
-          <a:lstStyle/>
-          <a:p>
-            <a:r>
-              <a:t>The Consume-Process-Produce Loop</a:t>
-            </a:r>
-          </a:p>
-        </p:txBody>
-      </p:sp>
-      <p:sp>
-        <p:nvSpPr>
-          <p:cNvPr id="3" name="Content Placeholder 2"/>
-          <p:cNvSpPr>
-            <a:spLocks noGrp="1"/>
-          </p:cNvSpPr>
-          <p:nvPr>
-            <p:ph idx="1"/>
-          </p:nvPr>
-        </p:nvSpPr>
-        <p:spPr/>
-        <p:txBody>
-          <a:bodyPr/>
-          <a:lstStyle/>
-          <a:p>
-            <a:r>
-              <a:t> The canonical exactly-once pattern, end to end:</a:t>
-            </a:r>
-          </a:p>
-          <a:p/>
-          <a:p/>
-          <a:p/>
-          <a:p/>
-          <a:p/>
-          <a:p/>
-          <a:p/>
-          <a:p>
-            <a:r>
-              <a:t> The consumer runs with</a:t>
-            </a:r>
-          </a:p>
-          <a:p>
-            <a:r>
-              <a:rPr i="1" b="1"/>
-              <a:t> enable.auto.commit=false</a:t>
-            </a:r>
-            <a:r>
-              <a:t> — offsets are committed</a:t>
-            </a:r>
-            <a:r>
-              <a:rPr b="1"/>
-              <a:t> only via the</a:t>
-            </a:r>
-          </a:p>
-          <a:p>
-            <a:r>
-              <a:t> Output records and the input-offset advance are now</a:t>
-            </a:r>
-            <a:r>
-              <a:rPr b="1"/>
-              <a:t> one atomic fact</a:t>
-            </a:r>
-          </a:p>
-        </p:txBody>
-      </p:sp>
-      <p:sp>
-        <p:nvSpPr>
-          <p:cNvPr id="4" name="TextBox 3"/>
-          <p:cNvSpPr txBox="1"/>
-          <p:nvPr/>
-        </p:nvSpPr>
-        <p:spPr>
-          <a:xfrm>
-            <a:off x="704088" y="8065008"/>
-            <a:ext cx="8915400" cy="228600"/>
-          </a:xfrm>
-          <a:prstGeom prst="rect">
-            <a:avLst/>
-          </a:prstGeom>
-          <a:noFill/>
-        </p:spPr>
-        <p:txBody>
-          <a:bodyPr wrap="none">
-            <a:spAutoFit/>
-          </a:bodyPr>
-          <a:lstStyle/>
-          <a:p>
-            <a:r>
-              <a:rPr sz="800">
-                <a:solidFill>
-                  <a:srgbClr val="000000"/>
-                </a:solidFill>
-              </a:rPr>
-              <a:t>Copyright © 2026 by Elephant Scale, All Rights Reserved</a:t>
-            </a:r>
-          </a:p>
-        </p:txBody>
-      </p:sp>
-      <p:pic>
-        <p:nvPicPr>
-          <p:cNvPr id="5" name="Picture 4" descr="1.png"/>
-          <p:cNvPicPr>
-            <a:picLocks noChangeAspect="1"/>
-          </p:cNvPicPr>
-          <p:nvPr/>
-        </p:nvPicPr>
-        <p:blipFill>
-          <a:blip r:embed="rId2"/>
-          <a:stretch>
-            <a:fillRect/>
-          </a:stretch>
-        </p:blipFill>
-        <p:spPr>
-          <a:xfrm>
-            <a:off x="0" y="1353312"/>
-            <a:ext cx="8915400" cy="3774104"/>
-          </a:xfrm>
-          <a:prstGeom prst="rect">
-            <a:avLst/>
-          </a:prstGeom>
-        </p:spPr>
-      </p:pic>
-    </p:spTree>
-  </p:cSld>
-  <p:clrMapOvr>
-    <a:masterClrMapping/>
-  </p:clrMapOvr>
-</p:sld>
-</file>
-
-<file path=ppt/slides/slide9.xml><?xml version="1.0" encoding="utf-8"?>
-<p:sld xmlns:a="http://schemas.openxmlformats.org/drawingml/2006/main" xmlns:p="http://schemas.openxmlformats.org/presentationml/2006/main" xmlns:r="http://schemas.openxmlformats.org/officeDocument/2006/relationships">
-  <p:cSld>
-    <p:spTree>
-      <p:nvGrpSpPr>
-        <p:cNvPr id="1" name=""/>
-        <p:cNvGrpSpPr/>
-        <p:nvPr/>
-      </p:nvGrpSpPr>
-      <p:grpSpPr/>
-      <p:sp>
-        <p:nvSpPr>
-          <p:cNvPr id="2" name="Title 1"/>
-          <p:cNvSpPr>
-            <a:spLocks noGrp="1"/>
-          </p:cNvSpPr>
-          <p:nvPr>
-            <p:ph type="title"/>
-          </p:nvPr>
-        </p:nvSpPr>
-        <p:spPr/>
-        <p:txBody>
-          <a:bodyPr/>
-          <a:lstStyle/>
-          <a:p>
-            <a:r>
-              <a:t>The Consumer Side: </a:t>
-            </a:r>
-          </a:p>
-        </p:txBody>
-      </p:sp>
-      <p:sp>
-        <p:nvSpPr>
-          <p:cNvPr id="3" name="Content Placeholder 2"/>
-          <p:cNvSpPr>
-            <a:spLocks noGrp="1"/>
-          </p:cNvSpPr>
-          <p:nvPr>
-            <p:ph idx="1"/>
-          </p:nvPr>
-        </p:nvSpPr>
-        <p:spPr/>
-        <p:txBody>
-          <a:bodyPr/>
-          <a:lstStyle/>
-          <a:p>
-            <a:r>
-              <a:t> Transactions on the write side only deliver exactly-once if the</a:t>
-            </a:r>
-            <a:r>
-              <a:rPr b="1"/>
-              <a:t> reader</a:t>
-            </a:r>
-            <a:r>
-              <a:t> agrees to ignore</a:t>
-            </a:r>
-            <a:r>
-              <a:t> uncommitted/aborted data.</a:t>
-            </a:r>
-          </a:p>
-          <a:p/>
-          <a:p/>
-          <a:p/>
-          <a:p/>
-          <a:p/>
-          <a:p/>
-          <a:p/>
-          <a:p>
-            <a:r>
-              <a:rPr>
-                <a:latin typeface="Courier New"/>
-              </a:rPr>
-              <a:t> read_committed</a:t>
-            </a:r>
-            <a:r>
-              <a:t> readers</a:t>
-            </a:r>
-            <a:r>
-              <a:rPr b="1"/>
-              <a:t> never see aborted output</a:t>
-            </a:r>
-            <a:r>
-              <a:t> and won't read past an open transaction</a:t>
-            </a:r>
-            <a:r>
-              <a:t> on that partition until it resolves</a:t>
-            </a:r>
-          </a:p>
-          <a:p>
-            <a:r>
-              <a:t> Exactly-once end to end =</a:t>
-            </a:r>
-            <a:r>
-              <a:rPr b="1"/>
-              <a:t> transactional producer +</a:t>
-            </a:r>
-          </a:p>
-        </p:txBody>
-      </p:sp>
-      <p:sp>
-        <p:nvSpPr>
-          <p:cNvPr id="4" name="TextBox 3"/>
-          <p:cNvSpPr txBox="1"/>
-          <p:nvPr/>
-        </p:nvSpPr>
-        <p:spPr>
-          <a:xfrm>
-            <a:off x="704088" y="8065008"/>
-            <a:ext cx="8915400" cy="228600"/>
-          </a:xfrm>
-          <a:prstGeom prst="rect">
-            <a:avLst/>
-          </a:prstGeom>
-          <a:noFill/>
-        </p:spPr>
-        <p:txBody>
-          <a:bodyPr wrap="none">
-            <a:spAutoFit/>
-          </a:bodyPr>
-          <a:lstStyle/>
-          <a:p>
-            <a:r>
-              <a:rPr sz="800">
-                <a:solidFill>
-                  <a:srgbClr val="000000"/>
-                </a:solidFill>
-              </a:rPr>
-              <a:t>Copyright © 2026 by Elephant Scale, All Rights Reserved</a:t>
-            </a:r>
-          </a:p>
-        </p:txBody>
-      </p:sp>
-      <p:pic>
-        <p:nvPicPr>
-          <p:cNvPr id="5" name="Picture 4" descr="1.png"/>
-          <p:cNvPicPr>
-            <a:picLocks noChangeAspect="1"/>
-          </p:cNvPicPr>
-          <p:nvPr/>
-        </p:nvPicPr>
-        <p:blipFill>
-          <a:blip r:embed="rId2"/>
-          <a:stretch>
-            <a:fillRect/>
-          </a:stretch>
-        </p:blipFill>
-        <p:spPr>
-          <a:xfrm>
-            <a:off x="0" y="1792224"/>
-            <a:ext cx="8915400" cy="1088335"/>
+            <a:off x="241479" y="1967872"/>
+            <a:ext cx="8285988" cy="1011500"/>
           </a:xfrm>
           <a:prstGeom prst="rect">
             <a:avLst/>
@@ -5147,7 +5386,7 @@
         </p:nvGraphicFramePr>
         <p:xfrm>
           <a:off x="237744" y="3108960"/>
-          <a:ext cx="8915400" cy="1371600"/>
+          <a:ext cx="8915400" cy="1737360"/>
         </p:xfrm>
         <a:graphic>
           <a:graphicData uri="http://schemas.openxmlformats.org/drawingml/2006/table">
@@ -5156,8 +5395,20 @@
                 <a:tableStyleId>{5C22544A-7EE6-4342-B048-85BDC9FD1C3A}</a:tableStyleId>
               </a:tblPr>
               <a:tblGrid>
-                <a:gridCol w="4457700"/>
-                <a:gridCol w="4457700"/>
+                <a:gridCol w="4457700">
+                  <a:extLst>
+                    <a:ext uri="{9D8B030D-6E8A-4147-A177-3AD203B41FA5}">
+                      <a16:colId xmlns:a16="http://schemas.microsoft.com/office/drawing/2014/main" val="20000"/>
+                    </a:ext>
+                  </a:extLst>
+                </a:gridCol>
+                <a:gridCol w="4457700">
+                  <a:extLst>
+                    <a:ext uri="{9D8B030D-6E8A-4147-A177-3AD203B41FA5}">
+                      <a16:colId xmlns:a16="http://schemas.microsoft.com/office/drawing/2014/main" val="20001"/>
+                    </a:ext>
+                  </a:extLst>
+                </a:gridCol>
               </a:tblGrid>
               <a:tr h="457200">
                 <a:tc>
@@ -5165,9 +5416,7 @@
                     <a:bodyPr/>
                     <a:lstStyle/>
                     <a:p>
-                      <a:r>
-                        <a:t/>
-                      </a:r>
+                      <a:endParaRPr/>
                     </a:p>
                   </a:txBody>
                   <a:tcPr/>
@@ -5184,6 +5433,11 @@
                   </a:txBody>
                   <a:tcPr/>
                 </a:tc>
+                <a:extLst>
+                  <a:ext uri="{0D108BD9-81ED-4DB2-BD59-A6C34878D82A}">
+                    <a16:rowId xmlns:a16="http://schemas.microsoft.com/office/drawing/2014/main" val="10000"/>
+                  </a:ext>
+                </a:extLst>
               </a:tr>
               <a:tr h="457200">
                 <a:tc>
@@ -5207,9 +5461,6 @@
                     <a:lstStyle/>
                     <a:p>
                       <a:r>
-                        <a:t/>
-                      </a:r>
-                      <a:r>
                         <a:rPr b="1"/>
                         <a:t>all</a:t>
                       </a:r>
@@ -5220,6 +5471,11 @@
                   </a:txBody>
                   <a:tcPr/>
                 </a:tc>
+                <a:extLst>
+                  <a:ext uri="{0D108BD9-81ED-4DB2-BD59-A6C34878D82A}">
+                    <a16:rowId xmlns:a16="http://schemas.microsoft.com/office/drawing/2014/main" val="10001"/>
+                  </a:ext>
+                </a:extLst>
               </a:tr>
               <a:tr h="457200">
                 <a:tc>
@@ -5256,6 +5512,11 @@
                   </a:txBody>
                   <a:tcPr/>
                 </a:tc>
+                <a:extLst>
+                  <a:ext uri="{0D108BD9-81ED-4DB2-BD59-A6C34878D82A}">
+                    <a16:rowId xmlns:a16="http://schemas.microsoft.com/office/drawing/2014/main" val="10002"/>
+                  </a:ext>
+                </a:extLst>
               </a:tr>
             </a:tbl>
           </a:graphicData>
